--- a/assets/pptx/catalog-501.pptx
+++ b/assets/pptx/catalog-501.pptx
@@ -3407,7 +3407,7 @@
                 <a:ea typeface="Ebrima"/>
                 <a:cs typeface="Ebrima"/>
               </a:rPr>
-              <a:t>ቸርነትህን ፊትህን እያየሁ (2x)</a:t>
+              <a:t>ቸርነትህን ፊትህን እያየሁ 2x</a:t>
             </a:r>
           </a:p>
         </p:txBody>
@@ -3510,7 +3510,7 @@
                 <a:ea typeface="Ebrima"/>
                 <a:cs typeface="Ebrima"/>
               </a:rPr>
-              <a:t>ቸርነትህን ፊትህን እያየሁ (2x)</a:t>
+              <a:t>ቸርነትህን ፊትህን እያየሁ 2x</a:t>
             </a:r>
           </a:p>
           <a:p>
@@ -3528,7 +3528,7 @@
                 <a:ea typeface="Ebrima"/>
                 <a:cs typeface="Ebrima"/>
               </a:rPr>
-              <a:t>ቸርነትህን ፊትህን እያየሁ (2x)</a:t>
+              <a:t>ቸርነትህን ፊትህን እያየሁ 2x</a:t>
             </a:r>
           </a:p>
         </p:txBody>
@@ -3649,7 +3649,7 @@
                 <a:ea typeface="Ebrima"/>
                 <a:cs typeface="Ebrima"/>
               </a:rPr>
-              <a:t>አምላኬን አይቼው አሳቀኝ (2x)</a:t>
+              <a:t>አምላኬን አይቼው አሳቀኝ 2x</a:t>
             </a:r>
           </a:p>
         </p:txBody>
@@ -3873,7 +3873,7 @@
                 <a:ea typeface="Ebrima"/>
                 <a:cs typeface="Ebrima"/>
               </a:rPr>
-              <a:t>ቸርነትህን ፊትህን እያየሁ (2x)</a:t>
+              <a:t>ቸርነትህን ፊትህን እያየሁ 2x</a:t>
             </a:r>
           </a:p>
         </p:txBody>
@@ -3994,7 +3994,7 @@
                 <a:ea typeface="Ebrima"/>
                 <a:cs typeface="Ebrima"/>
               </a:rPr>
-              <a:t>የብሶት መታዘን ተዋቸው (2x)</a:t>
+              <a:t>የብሶት መታዘን ተዋቸው 2x</a:t>
             </a:r>
           </a:p>
         </p:txBody>
@@ -4218,7 +4218,7 @@
                 <a:ea typeface="Ebrima"/>
                 <a:cs typeface="Ebrima"/>
               </a:rPr>
-              <a:t>ቸርነትህን ፊትህን እያየሁ (2x)</a:t>
+              <a:t>ቸርነትህን ፊትህን እያየሁ 2x</a:t>
             </a:r>
           </a:p>
         </p:txBody>
